--- a/submission/OpsMind_AI_Deck_ID.pptx
+++ b/submission/OpsMind_AI_Deck_ID.pptx
@@ -7248,7 +7248,7 @@
                 </a:solidFill>
                 <a:latin typeface="Arial"/>
               </a:rPr>
-              <a:t>Tim: OpsMind AI   ·   Ketua: Sisawaktu 11</a:t>
+              <a:t>Tim: ABB Catalyst   ·   Ketua: Alwi Hamzah</a:t>
             </a:r>
           </a:p>
           <a:p>

--- a/submission/OpsMind_AI_Deck_ID.pptx
+++ b/submission/OpsMind_AI_Deck_ID.pptx
@@ -8847,7 +8847,7 @@
                 </a:solidFill>
                 <a:latin typeface="Arial"/>
               </a:rPr>
-              <a:t>• Repositori GitHub publik: lihat form submission Hack2skill.</a:t>
+              <a:t>• Repositori GitHub publik: https://github.com/Elwyun/opsmind</a:t>
             </a:r>
           </a:p>
           <a:p>
@@ -8866,7 +8866,7 @@
                 </a:solidFill>
                 <a:latin typeface="Arial"/>
               </a:rPr>
-              <a:t>• Video demo (&lt;3 menit): lihat form submission.</a:t>
+              <a:t>• Video demo (&lt;3 menit): https://drive.google.com/file/d/1MbWaVnI91_w6GK38qvh7ldsoKX-j5wls/view</a:t>
             </a:r>
           </a:p>
           <a:p>
@@ -8885,7 +8885,7 @@
                 </a:solidFill>
                 <a:latin typeface="Arial"/>
               </a:rPr>
-              <a:t>• Prototipe live: lihat form submission.</a:t>
+              <a:t>• Prototipe live: https://opsmind-483387477810.asia-southeast1.run.app</a:t>
             </a:r>
           </a:p>
           <a:p>
